--- a/oooe 데구.pptx
+++ b/oooe 데구.pptx
@@ -243,7 +243,7 @@
           <a:p>
             <a:fld id="{6FA1AA2F-FC71-4471-BD17-9646155D06AC}" type="datetimeFigureOut">
               <a:rPr lang="ko-KR" altLang="en-US" smtClean="0"/>
-              <a:t>2026-04-21</a:t>
+              <a:t>2026-04-25</a:t>
             </a:fld>
             <a:endParaRPr lang="ko-KR" altLang="en-US"/>
           </a:p>
@@ -413,7 +413,7 @@
           <a:p>
             <a:fld id="{6FA1AA2F-FC71-4471-BD17-9646155D06AC}" type="datetimeFigureOut">
               <a:rPr lang="ko-KR" altLang="en-US" smtClean="0"/>
-              <a:t>2026-04-21</a:t>
+              <a:t>2026-04-25</a:t>
             </a:fld>
             <a:endParaRPr lang="ko-KR" altLang="en-US"/>
           </a:p>
@@ -593,7 +593,7 @@
           <a:p>
             <a:fld id="{6FA1AA2F-FC71-4471-BD17-9646155D06AC}" type="datetimeFigureOut">
               <a:rPr lang="ko-KR" altLang="en-US" smtClean="0"/>
-              <a:t>2026-04-21</a:t>
+              <a:t>2026-04-25</a:t>
             </a:fld>
             <a:endParaRPr lang="ko-KR" altLang="en-US"/>
           </a:p>
@@ -763,7 +763,7 @@
           <a:p>
             <a:fld id="{6FA1AA2F-FC71-4471-BD17-9646155D06AC}" type="datetimeFigureOut">
               <a:rPr lang="ko-KR" altLang="en-US" smtClean="0"/>
-              <a:t>2026-04-21</a:t>
+              <a:t>2026-04-25</a:t>
             </a:fld>
             <a:endParaRPr lang="ko-KR" altLang="en-US"/>
           </a:p>
@@ -1009,7 +1009,7 @@
           <a:p>
             <a:fld id="{6FA1AA2F-FC71-4471-BD17-9646155D06AC}" type="datetimeFigureOut">
               <a:rPr lang="ko-KR" altLang="en-US" smtClean="0"/>
-              <a:t>2026-04-21</a:t>
+              <a:t>2026-04-25</a:t>
             </a:fld>
             <a:endParaRPr lang="ko-KR" altLang="en-US"/>
           </a:p>
@@ -1241,7 +1241,7 @@
           <a:p>
             <a:fld id="{6FA1AA2F-FC71-4471-BD17-9646155D06AC}" type="datetimeFigureOut">
               <a:rPr lang="ko-KR" altLang="en-US" smtClean="0"/>
-              <a:t>2026-04-21</a:t>
+              <a:t>2026-04-25</a:t>
             </a:fld>
             <a:endParaRPr lang="ko-KR" altLang="en-US"/>
           </a:p>
@@ -1608,7 +1608,7 @@
           <a:p>
             <a:fld id="{6FA1AA2F-FC71-4471-BD17-9646155D06AC}" type="datetimeFigureOut">
               <a:rPr lang="ko-KR" altLang="en-US" smtClean="0"/>
-              <a:t>2026-04-21</a:t>
+              <a:t>2026-04-25</a:t>
             </a:fld>
             <a:endParaRPr lang="ko-KR" altLang="en-US"/>
           </a:p>
@@ -1726,7 +1726,7 @@
           <a:p>
             <a:fld id="{6FA1AA2F-FC71-4471-BD17-9646155D06AC}" type="datetimeFigureOut">
               <a:rPr lang="ko-KR" altLang="en-US" smtClean="0"/>
-              <a:t>2026-04-21</a:t>
+              <a:t>2026-04-25</a:t>
             </a:fld>
             <a:endParaRPr lang="ko-KR" altLang="en-US"/>
           </a:p>
@@ -1821,7 +1821,7 @@
           <a:p>
             <a:fld id="{6FA1AA2F-FC71-4471-BD17-9646155D06AC}" type="datetimeFigureOut">
               <a:rPr lang="ko-KR" altLang="en-US" smtClean="0"/>
-              <a:t>2026-04-21</a:t>
+              <a:t>2026-04-25</a:t>
             </a:fld>
             <a:endParaRPr lang="ko-KR" altLang="en-US"/>
           </a:p>
@@ -2098,7 +2098,7 @@
           <a:p>
             <a:fld id="{6FA1AA2F-FC71-4471-BD17-9646155D06AC}" type="datetimeFigureOut">
               <a:rPr lang="ko-KR" altLang="en-US" smtClean="0"/>
-              <a:t>2026-04-21</a:t>
+              <a:t>2026-04-25</a:t>
             </a:fld>
             <a:endParaRPr lang="ko-KR" altLang="en-US"/>
           </a:p>
@@ -2355,7 +2355,7 @@
           <a:p>
             <a:fld id="{6FA1AA2F-FC71-4471-BD17-9646155D06AC}" type="datetimeFigureOut">
               <a:rPr lang="ko-KR" altLang="en-US" smtClean="0"/>
-              <a:t>2026-04-21</a:t>
+              <a:t>2026-04-25</a:t>
             </a:fld>
             <a:endParaRPr lang="ko-KR" altLang="en-US"/>
           </a:p>
@@ -2568,7 +2568,7 @@
           <a:p>
             <a:fld id="{6FA1AA2F-FC71-4471-BD17-9646155D06AC}" type="datetimeFigureOut">
               <a:rPr lang="ko-KR" altLang="en-US" smtClean="0"/>
-              <a:t>2026-04-21</a:t>
+              <a:t>2026-04-25</a:t>
             </a:fld>
             <a:endParaRPr lang="ko-KR" altLang="en-US"/>
           </a:p>
@@ -3043,7 +3043,7 @@
                   <a:schemeClr val="accent2"/>
                 </a:solidFill>
               </a:rPr>
-              <a:t>Instruction Status Table</a:t>
+              <a:t>Ready Station</a:t>
             </a:r>
             <a:endParaRPr lang="ko-KR" altLang="en-US" sz="1867" b="1" dirty="0">
               <a:solidFill>
@@ -5347,7 +5347,13 @@
           <p:cNvGraphicFramePr>
             <a:graphicFrameLocks noGrp="1"/>
           </p:cNvGraphicFramePr>
-          <p:nvPr/>
+          <p:nvPr>
+            <p:extLst>
+              <p:ext uri="{D42A27DB-BD31-4B8C-83A1-F6EECF244321}">
+                <p14:modId xmlns:p14="http://schemas.microsoft.com/office/powerpoint/2010/main" val="760095577"/>
+              </p:ext>
+            </p:extLst>
+          </p:nvPr>
         </p:nvGraphicFramePr>
         <p:xfrm>
           <a:off x="11669848" y="7314131"/>
@@ -5390,12 +5396,12 @@
                     <a:p>
                       <a:pPr algn="ctr" latinLnBrk="1"/>
                       <a:r>
-                        <a:rPr lang="en-US" altLang="ko-KR" sz="1200" dirty="0">
+                        <a:rPr lang="en-US" altLang="ko-KR" sz="1200" dirty="0" err="1">
                           <a:solidFill>
                             <a:sysClr val="windowText" lastClr="000000"/>
                           </a:solidFill>
                         </a:rPr>
-                        <a:t>P_new</a:t>
+                        <a:t>P_src</a:t>
                       </a:r>
                       <a:endParaRPr lang="ko-KR" altLang="en-US" sz="1200" dirty="0">
                         <a:solidFill>
@@ -5590,7 +5596,13 @@
           <p:cNvGraphicFramePr>
             <a:graphicFrameLocks noGrp="1"/>
           </p:cNvGraphicFramePr>
-          <p:nvPr/>
+          <p:nvPr>
+            <p:extLst>
+              <p:ext uri="{D42A27DB-BD31-4B8C-83A1-F6EECF244321}">
+                <p14:modId xmlns:p14="http://schemas.microsoft.com/office/powerpoint/2010/main" val="2705427395"/>
+              </p:ext>
+            </p:extLst>
+          </p:nvPr>
         </p:nvGraphicFramePr>
         <p:xfrm>
           <a:off x="14538487" y="7311447"/>
@@ -5640,12 +5652,12 @@
                     <a:p>
                       <a:pPr algn="ctr" latinLnBrk="1"/>
                       <a:r>
-                        <a:rPr lang="en-US" altLang="ko-KR" sz="1200" dirty="0">
+                        <a:rPr lang="en-US" altLang="ko-KR" sz="1200" dirty="0" err="1">
                           <a:solidFill>
                             <a:sysClr val="windowText" lastClr="000000"/>
                           </a:solidFill>
                         </a:rPr>
-                        <a:t>P_new</a:t>
+                        <a:t>P_src</a:t>
                       </a:r>
                       <a:endParaRPr lang="ko-KR" altLang="en-US" sz="1200" dirty="0">
                         <a:solidFill>
@@ -7187,7 +7199,13 @@
           <p:cNvGraphicFramePr>
             <a:graphicFrameLocks noGrp="1"/>
           </p:cNvGraphicFramePr>
-          <p:nvPr/>
+          <p:nvPr>
+            <p:extLst>
+              <p:ext uri="{D42A27DB-BD31-4B8C-83A1-F6EECF244321}">
+                <p14:modId xmlns:p14="http://schemas.microsoft.com/office/powerpoint/2010/main" val="952917741"/>
+              </p:ext>
+            </p:extLst>
+          </p:nvPr>
         </p:nvGraphicFramePr>
         <p:xfrm>
           <a:off x="11669848" y="8369176"/>
@@ -7230,12 +7248,12 @@
                     <a:p>
                       <a:pPr algn="ctr" latinLnBrk="1"/>
                       <a:r>
-                        <a:rPr lang="en-US" altLang="ko-KR" sz="1200" dirty="0">
+                        <a:rPr lang="en-US" altLang="ko-KR" sz="1200" dirty="0" err="1">
                           <a:solidFill>
                             <a:sysClr val="windowText" lastClr="000000"/>
                           </a:solidFill>
                         </a:rPr>
-                        <a:t>P_new</a:t>
+                        <a:t>P_src</a:t>
                       </a:r>
                       <a:endParaRPr lang="ko-KR" altLang="en-US" sz="1200" dirty="0">
                         <a:solidFill>
@@ -7430,7 +7448,13 @@
           <p:cNvGraphicFramePr>
             <a:graphicFrameLocks noGrp="1"/>
           </p:cNvGraphicFramePr>
-          <p:nvPr/>
+          <p:nvPr>
+            <p:extLst>
+              <p:ext uri="{D42A27DB-BD31-4B8C-83A1-F6EECF244321}">
+                <p14:modId xmlns:p14="http://schemas.microsoft.com/office/powerpoint/2010/main" val="1920416717"/>
+              </p:ext>
+            </p:extLst>
+          </p:nvPr>
         </p:nvGraphicFramePr>
         <p:xfrm>
           <a:off x="14538487" y="8369176"/>
@@ -7480,12 +7504,12 @@
                     <a:p>
                       <a:pPr algn="ctr" latinLnBrk="1"/>
                       <a:r>
-                        <a:rPr lang="en-US" altLang="ko-KR" sz="1200" dirty="0">
+                        <a:rPr lang="en-US" altLang="ko-KR" sz="1200" dirty="0" err="1">
                           <a:solidFill>
                             <a:sysClr val="windowText" lastClr="000000"/>
                           </a:solidFill>
                         </a:rPr>
-                        <a:t>P_new</a:t>
+                        <a:t>P_src</a:t>
                       </a:r>
                       <a:endParaRPr lang="ko-KR" altLang="en-US" sz="1200" dirty="0">
                         <a:solidFill>
@@ -18273,8 +18297,8 @@
         </p:nvSpPr>
         <p:spPr>
           <a:xfrm>
-            <a:off x="22388187" y="1045029"/>
-            <a:ext cx="5015498" cy="3408984"/>
+            <a:off x="22388187" y="1045028"/>
+            <a:ext cx="5015498" cy="4473639"/>
           </a:xfrm>
           <a:prstGeom prst="rect">
             <a:avLst/>
@@ -18346,8 +18370,8 @@
         </p:nvSpPr>
         <p:spPr>
           <a:xfrm rot="5400000">
-            <a:off x="25387456" y="1700592"/>
-            <a:ext cx="2666583" cy="180640"/>
+            <a:off x="25021141" y="2244709"/>
+            <a:ext cx="3754813" cy="180640"/>
           </a:xfrm>
           <a:prstGeom prst="rect">
             <a:avLst/>
@@ -18511,8 +18535,8 @@
         </p:nvSpPr>
         <p:spPr>
           <a:xfrm rot="10800000">
-            <a:off x="26528749" y="3441700"/>
-            <a:ext cx="375107" cy="12589780"/>
+            <a:off x="26528747" y="4536280"/>
+            <a:ext cx="375107" cy="11495198"/>
           </a:xfrm>
           <a:prstGeom prst="downArrow">
             <a:avLst/>
@@ -19660,13 +19684,13 @@
         </p:nvCxnSpPr>
         <p:spPr>
           <a:xfrm rot="16200000" flipH="1" flipV="1">
-            <a:off x="16787168" y="-6564125"/>
-            <a:ext cx="499614" cy="15717922"/>
+            <a:off x="16787168" y="-6564127"/>
+            <a:ext cx="499614" cy="15717923"/>
           </a:xfrm>
           <a:prstGeom prst="bentConnector4">
             <a:avLst>
-              <a:gd name="adj1" fmla="val -36899"/>
-              <a:gd name="adj2" fmla="val 100014"/>
+              <a:gd name="adj1" fmla="val -27846"/>
+              <a:gd name="adj2" fmla="val 99968"/>
             </a:avLst>
           </a:prstGeom>
           <a:ln w="38100">
@@ -20357,7 +20381,13 @@
           <p:cNvGraphicFramePr>
             <a:graphicFrameLocks noGrp="1"/>
           </p:cNvGraphicFramePr>
-          <p:nvPr/>
+          <p:nvPr>
+            <p:extLst>
+              <p:ext uri="{D42A27DB-BD31-4B8C-83A1-F6EECF244321}">
+                <p14:modId xmlns:p14="http://schemas.microsoft.com/office/powerpoint/2010/main" val="3754699364"/>
+              </p:ext>
+            </p:extLst>
+          </p:nvPr>
         </p:nvGraphicFramePr>
         <p:xfrm>
           <a:off x="1603376" y="14662034"/>
@@ -20627,8 +20657,8 @@
         </p:nvSpPr>
         <p:spPr>
           <a:xfrm>
-            <a:off x="22961223" y="1492250"/>
-            <a:ext cx="2467806" cy="2578305"/>
+            <a:off x="22961223" y="2698750"/>
+            <a:ext cx="2467806" cy="2479636"/>
           </a:xfrm>
           <a:prstGeom prst="rect">
             <a:avLst/>
@@ -20706,13 +20736,13 @@
           <p:nvPr>
             <p:extLst>
               <p:ext uri="{D42A27DB-BD31-4B8C-83A1-F6EECF244321}">
-                <p14:modId xmlns:p14="http://schemas.microsoft.com/office/powerpoint/2010/main" val="398670853"/>
+                <p14:modId xmlns:p14="http://schemas.microsoft.com/office/powerpoint/2010/main" val="2180692342"/>
               </p:ext>
             </p:extLst>
           </p:nvPr>
         </p:nvGraphicFramePr>
         <p:xfrm>
-          <a:off x="23419475" y="2231623"/>
+          <a:off x="23419475" y="3339454"/>
           <a:ext cx="1563499" cy="313891"/>
         </p:xfrm>
         <a:graphic>
@@ -20954,8 +20984,8 @@
         </p:nvSpPr>
         <p:spPr>
           <a:xfrm rot="5400000">
-            <a:off x="17758851" y="3862900"/>
-            <a:ext cx="3233737" cy="146617"/>
+            <a:off x="18311299" y="4415349"/>
+            <a:ext cx="2128839" cy="146617"/>
           </a:xfrm>
           <a:prstGeom prst="rect">
             <a:avLst/>
@@ -21006,7 +21036,7 @@
         </p:nvSpPr>
         <p:spPr>
           <a:xfrm rot="16200000" flipH="1">
-            <a:off x="21168293" y="357212"/>
+            <a:off x="21168293" y="1465043"/>
             <a:ext cx="375107" cy="4108449"/>
           </a:xfrm>
           <a:prstGeom prst="downArrow">
@@ -21311,8 +21341,8 @@
         </p:nvSpPr>
         <p:spPr>
           <a:xfrm rot="5400000">
-            <a:off x="16487875" y="3160553"/>
-            <a:ext cx="3080411" cy="180640"/>
+            <a:off x="17042243" y="3714921"/>
+            <a:ext cx="1971676" cy="180640"/>
           </a:xfrm>
           <a:prstGeom prst="rect">
             <a:avLst/>
@@ -21366,7 +21396,7 @@
         </p:nvSpPr>
         <p:spPr>
           <a:xfrm>
-            <a:off x="17960073" y="1710664"/>
+            <a:off x="17960073" y="2818495"/>
             <a:ext cx="6798577" cy="180640"/>
           </a:xfrm>
           <a:prstGeom prst="rect">
@@ -21421,7 +21451,7 @@
         </p:nvSpPr>
         <p:spPr>
           <a:xfrm>
-            <a:off x="24488418" y="1710665"/>
+            <a:off x="24488418" y="2818496"/>
             <a:ext cx="375107" cy="520960"/>
           </a:xfrm>
           <a:prstGeom prst="downArrow">
@@ -21481,7 +21511,7 @@
         </p:nvSpPr>
         <p:spPr>
           <a:xfrm>
-            <a:off x="24396770" y="2279413"/>
+            <a:off x="24396770" y="3387244"/>
             <a:ext cx="534918" cy="231083"/>
           </a:xfrm>
           <a:prstGeom prst="rect">
@@ -21539,7 +21569,7 @@
         </p:nvSpPr>
         <p:spPr>
           <a:xfrm>
-            <a:off x="23555325" y="2280018"/>
+            <a:off x="23555325" y="3387849"/>
             <a:ext cx="466725" cy="224126"/>
           </a:xfrm>
           <a:prstGeom prst="rect">
@@ -21599,7 +21629,7 @@
         </p:nvCxnSpPr>
         <p:spPr>
           <a:xfrm>
-            <a:off x="24025210" y="2504239"/>
+            <a:off x="24025210" y="3612070"/>
             <a:ext cx="354254" cy="0"/>
           </a:xfrm>
           <a:prstGeom prst="straightConnector1">
@@ -21642,8 +21672,8 @@
         </p:nvSpPr>
         <p:spPr>
           <a:xfrm rot="5400000">
-            <a:off x="18512944" y="-7546819"/>
-            <a:ext cx="375107" cy="16196186"/>
+            <a:off x="18572475" y="-7606349"/>
+            <a:ext cx="375107" cy="16315248"/>
           </a:xfrm>
           <a:prstGeom prst="downArrow">
             <a:avLst/>
@@ -21703,13 +21733,13 @@
           <p:nvPr>
             <p:extLst>
               <p:ext uri="{D42A27DB-BD31-4B8C-83A1-F6EECF244321}">
-                <p14:modId xmlns:p14="http://schemas.microsoft.com/office/powerpoint/2010/main" val="503183972"/>
+                <p14:modId xmlns:p14="http://schemas.microsoft.com/office/powerpoint/2010/main" val="2163424581"/>
               </p:ext>
             </p:extLst>
           </p:nvPr>
         </p:nvGraphicFramePr>
         <p:xfrm>
-          <a:off x="26357775" y="3105950"/>
+          <a:off x="26357775" y="4213781"/>
           <a:ext cx="721509" cy="313891"/>
         </p:xfrm>
         <a:graphic>
@@ -21815,8 +21845,8 @@
         </p:nvSpPr>
         <p:spPr>
           <a:xfrm rot="5400000">
-            <a:off x="21525246" y="6468908"/>
-            <a:ext cx="6339979" cy="180640"/>
+            <a:off x="22097578" y="7041241"/>
+            <a:ext cx="5195315" cy="180640"/>
           </a:xfrm>
           <a:prstGeom prst="rect">
             <a:avLst/>
@@ -21870,7 +21900,7 @@
         </p:nvSpPr>
         <p:spPr>
           <a:xfrm rot="5400000">
-            <a:off x="25488989" y="2589481"/>
+            <a:off x="25488989" y="3697312"/>
             <a:ext cx="375107" cy="1346835"/>
           </a:xfrm>
           <a:prstGeom prst="downArrow">
@@ -21931,13 +21961,13 @@
           <p:nvPr>
             <p:extLst>
               <p:ext uri="{D42A27DB-BD31-4B8C-83A1-F6EECF244321}">
-                <p14:modId xmlns:p14="http://schemas.microsoft.com/office/powerpoint/2010/main" val="2090954779"/>
+                <p14:modId xmlns:p14="http://schemas.microsoft.com/office/powerpoint/2010/main" val="3118907018"/>
               </p:ext>
             </p:extLst>
           </p:nvPr>
         </p:nvGraphicFramePr>
         <p:xfrm>
-          <a:off x="23427186" y="3102511"/>
+          <a:off x="23427186" y="4210342"/>
           <a:ext cx="1563499" cy="313891"/>
         </p:xfrm>
         <a:graphic>
@@ -22179,7 +22209,7 @@
         </p:nvSpPr>
         <p:spPr>
           <a:xfrm rot="7723048" flipH="1">
-            <a:off x="24688870" y="2300074"/>
+            <a:off x="24688870" y="3407905"/>
             <a:ext cx="711183" cy="622157"/>
           </a:xfrm>
           <a:prstGeom prst="uturnArrow">
@@ -22226,6 +22256,396 @@
                 <a:schemeClr val="tx1"/>
               </a:solidFill>
             </a:endParaRPr>
+          </a:p>
+        </p:txBody>
+      </p:sp>
+      <p:sp>
+        <p:nvSpPr>
+          <p:cNvPr id="68" name="직사각형 67">
+            <a:extLst>
+              <a:ext uri="{FF2B5EF4-FFF2-40B4-BE49-F238E27FC236}">
+                <a16:creationId xmlns:a16="http://schemas.microsoft.com/office/drawing/2014/main" id="{707316A8-B558-8BEE-D294-CFA9F64D2127}"/>
+              </a:ext>
+            </a:extLst>
+          </p:cNvPr>
+          <p:cNvSpPr/>
+          <p:nvPr/>
+        </p:nvSpPr>
+        <p:spPr>
+          <a:xfrm>
+            <a:off x="10573866" y="2309936"/>
+            <a:ext cx="16058034" cy="180640"/>
+          </a:xfrm>
+          <a:prstGeom prst="rect">
+            <a:avLst/>
+          </a:prstGeom>
+          <a:solidFill>
+            <a:schemeClr val="accent1">
+              <a:lumMod val="60000"/>
+              <a:lumOff val="40000"/>
+            </a:schemeClr>
+          </a:solidFill>
+          <a:ln>
+            <a:noFill/>
+          </a:ln>
+        </p:spPr>
+        <p:style>
+          <a:lnRef idx="2">
+            <a:schemeClr val="accent1">
+              <a:shade val="50000"/>
+            </a:schemeClr>
+          </a:lnRef>
+          <a:fillRef idx="1">
+            <a:schemeClr val="accent1"/>
+          </a:fillRef>
+          <a:effectRef idx="0">
+            <a:schemeClr val="accent1"/>
+          </a:effectRef>
+          <a:fontRef idx="minor">
+            <a:schemeClr val="lt1"/>
+          </a:fontRef>
+        </p:style>
+        <p:txBody>
+          <a:bodyPr rtlCol="0" anchor="ctr"/>
+          <a:lstStyle/>
+          <a:p>
+            <a:pPr algn="ctr"/>
+            <a:endParaRPr lang="ko-KR" altLang="en-US"/>
+          </a:p>
+        </p:txBody>
+      </p:sp>
+      <p:sp>
+        <p:nvSpPr>
+          <p:cNvPr id="75" name="아래쪽 화살표 88">
+            <a:extLst>
+              <a:ext uri="{FF2B5EF4-FFF2-40B4-BE49-F238E27FC236}">
+                <a16:creationId xmlns:a16="http://schemas.microsoft.com/office/drawing/2014/main" id="{80FC5062-0C4B-3420-DE9C-85503E759D34}"/>
+              </a:ext>
+            </a:extLst>
+          </p:cNvPr>
+          <p:cNvSpPr/>
+          <p:nvPr/>
+        </p:nvSpPr>
+        <p:spPr>
+          <a:xfrm>
+            <a:off x="26348968" y="2317750"/>
+            <a:ext cx="375107" cy="1885306"/>
+          </a:xfrm>
+          <a:prstGeom prst="downArrow">
+            <a:avLst/>
+          </a:prstGeom>
+          <a:solidFill>
+            <a:schemeClr val="accent1">
+              <a:lumMod val="60000"/>
+              <a:lumOff val="40000"/>
+            </a:schemeClr>
+          </a:solidFill>
+          <a:ln>
+            <a:noFill/>
+          </a:ln>
+        </p:spPr>
+        <p:style>
+          <a:lnRef idx="2">
+            <a:schemeClr val="accent1">
+              <a:shade val="50000"/>
+            </a:schemeClr>
+          </a:lnRef>
+          <a:fillRef idx="1">
+            <a:schemeClr val="accent1"/>
+          </a:fillRef>
+          <a:effectRef idx="0">
+            <a:schemeClr val="accent1"/>
+          </a:effectRef>
+          <a:fontRef idx="minor">
+            <a:schemeClr val="lt1"/>
+          </a:fontRef>
+        </p:style>
+        <p:txBody>
+          <a:bodyPr rot="0" spcFirstLastPara="0" vertOverflow="overflow" horzOverflow="overflow" vert="horz" wrap="square" lIns="121917" tIns="60959" rIns="121917" bIns="60959" numCol="1" spcCol="0" rtlCol="0" fromWordArt="0" anchor="ctr" anchorCtr="0" forceAA="0" compatLnSpc="1">
+            <a:prstTxWarp prst="textNoShape">
+              <a:avLst/>
+            </a:prstTxWarp>
+            <a:noAutofit/>
+          </a:bodyPr>
+          <a:lstStyle/>
+          <a:p>
+            <a:pPr algn="ctr"/>
+            <a:endParaRPr lang="ko-KR" altLang="en-US" sz="2400"/>
+          </a:p>
+        </p:txBody>
+      </p:sp>
+      <p:sp>
+        <p:nvSpPr>
+          <p:cNvPr id="43" name="직사각형 42">
+            <a:extLst>
+              <a:ext uri="{FF2B5EF4-FFF2-40B4-BE49-F238E27FC236}">
+                <a16:creationId xmlns:a16="http://schemas.microsoft.com/office/drawing/2014/main" id="{075B9100-771F-3E56-7A0E-A7D96E524D1B}"/>
+              </a:ext>
+            </a:extLst>
+          </p:cNvPr>
+          <p:cNvSpPr/>
+          <p:nvPr/>
+        </p:nvSpPr>
+        <p:spPr>
+          <a:xfrm rot="5400000">
+            <a:off x="19289888" y="4109907"/>
+            <a:ext cx="173203" cy="147120"/>
+          </a:xfrm>
+          <a:prstGeom prst="rect">
+            <a:avLst/>
+          </a:prstGeom>
+          <a:solidFill>
+            <a:schemeClr val="accent1">
+              <a:lumMod val="60000"/>
+              <a:lumOff val="40000"/>
+            </a:schemeClr>
+          </a:solidFill>
+          <a:ln>
+            <a:noFill/>
+          </a:ln>
+        </p:spPr>
+        <p:style>
+          <a:lnRef idx="2">
+            <a:schemeClr val="accent1">
+              <a:shade val="50000"/>
+            </a:schemeClr>
+          </a:lnRef>
+          <a:fillRef idx="1">
+            <a:schemeClr val="accent1"/>
+          </a:fillRef>
+          <a:effectRef idx="0">
+            <a:schemeClr val="accent1"/>
+          </a:effectRef>
+          <a:fontRef idx="minor">
+            <a:schemeClr val="lt1"/>
+          </a:fontRef>
+        </p:style>
+        <p:txBody>
+          <a:bodyPr rtlCol="0" anchor="ctr"/>
+          <a:lstStyle/>
+          <a:p>
+            <a:pPr algn="ctr"/>
+            <a:endParaRPr lang="ko-KR" altLang="en-US"/>
+          </a:p>
+        </p:txBody>
+      </p:sp>
+      <p:sp>
+        <p:nvSpPr>
+          <p:cNvPr id="98" name="직사각형 97">
+            <a:extLst>
+              <a:ext uri="{FF2B5EF4-FFF2-40B4-BE49-F238E27FC236}">
+                <a16:creationId xmlns:a16="http://schemas.microsoft.com/office/drawing/2014/main" id="{484F4677-A871-7FA3-0CBB-DEF564587975}"/>
+              </a:ext>
+            </a:extLst>
+          </p:cNvPr>
+          <p:cNvSpPr/>
+          <p:nvPr/>
+        </p:nvSpPr>
+        <p:spPr>
+          <a:xfrm rot="5400000">
+            <a:off x="19288438" y="4763108"/>
+            <a:ext cx="173203" cy="154781"/>
+          </a:xfrm>
+          <a:prstGeom prst="rect">
+            <a:avLst/>
+          </a:prstGeom>
+          <a:solidFill>
+            <a:schemeClr val="accent1">
+              <a:lumMod val="60000"/>
+              <a:lumOff val="40000"/>
+            </a:schemeClr>
+          </a:solidFill>
+          <a:ln>
+            <a:noFill/>
+          </a:ln>
+        </p:spPr>
+        <p:style>
+          <a:lnRef idx="2">
+            <a:schemeClr val="accent1">
+              <a:shade val="50000"/>
+            </a:schemeClr>
+          </a:lnRef>
+          <a:fillRef idx="1">
+            <a:schemeClr val="accent1"/>
+          </a:fillRef>
+          <a:effectRef idx="0">
+            <a:schemeClr val="accent1"/>
+          </a:effectRef>
+          <a:fontRef idx="minor">
+            <a:schemeClr val="lt1"/>
+          </a:fontRef>
+        </p:style>
+        <p:txBody>
+          <a:bodyPr rtlCol="0" anchor="ctr"/>
+          <a:lstStyle/>
+          <a:p>
+            <a:pPr algn="ctr"/>
+            <a:endParaRPr lang="ko-KR" altLang="en-US"/>
+          </a:p>
+        </p:txBody>
+      </p:sp>
+      <p:sp>
+        <p:nvSpPr>
+          <p:cNvPr id="117" name="직사각형 116">
+            <a:extLst>
+              <a:ext uri="{FF2B5EF4-FFF2-40B4-BE49-F238E27FC236}">
+                <a16:creationId xmlns:a16="http://schemas.microsoft.com/office/drawing/2014/main" id="{09CDE3D9-C816-EFB5-83BF-B45B248CC1B9}"/>
+              </a:ext>
+            </a:extLst>
+          </p:cNvPr>
+          <p:cNvSpPr/>
+          <p:nvPr/>
+        </p:nvSpPr>
+        <p:spPr>
+          <a:xfrm rot="5400000">
+            <a:off x="19288438" y="5411579"/>
+            <a:ext cx="173203" cy="154781"/>
+          </a:xfrm>
+          <a:prstGeom prst="rect">
+            <a:avLst/>
+          </a:prstGeom>
+          <a:solidFill>
+            <a:schemeClr val="accent1">
+              <a:lumMod val="60000"/>
+              <a:lumOff val="40000"/>
+            </a:schemeClr>
+          </a:solidFill>
+          <a:ln>
+            <a:noFill/>
+          </a:ln>
+        </p:spPr>
+        <p:style>
+          <a:lnRef idx="2">
+            <a:schemeClr val="accent1">
+              <a:shade val="50000"/>
+            </a:schemeClr>
+          </a:lnRef>
+          <a:fillRef idx="1">
+            <a:schemeClr val="accent1"/>
+          </a:fillRef>
+          <a:effectRef idx="0">
+            <a:schemeClr val="accent1"/>
+          </a:effectRef>
+          <a:fontRef idx="minor">
+            <a:schemeClr val="lt1"/>
+          </a:fontRef>
+        </p:style>
+        <p:txBody>
+          <a:bodyPr rtlCol="0" anchor="ctr"/>
+          <a:lstStyle/>
+          <a:p>
+            <a:pPr algn="ctr"/>
+            <a:endParaRPr lang="ko-KR" altLang="en-US"/>
+          </a:p>
+        </p:txBody>
+      </p:sp>
+      <p:sp>
+        <p:nvSpPr>
+          <p:cNvPr id="136" name="직사각형 135">
+            <a:extLst>
+              <a:ext uri="{FF2B5EF4-FFF2-40B4-BE49-F238E27FC236}">
+                <a16:creationId xmlns:a16="http://schemas.microsoft.com/office/drawing/2014/main" id="{3DCE20F6-F1AE-A824-07B1-F72CC67497CD}"/>
+              </a:ext>
+            </a:extLst>
+          </p:cNvPr>
+          <p:cNvSpPr/>
+          <p:nvPr/>
+        </p:nvSpPr>
+        <p:spPr>
+          <a:xfrm rot="5400000">
+            <a:off x="19288438" y="6069495"/>
+            <a:ext cx="173203" cy="154781"/>
+          </a:xfrm>
+          <a:prstGeom prst="rect">
+            <a:avLst/>
+          </a:prstGeom>
+          <a:solidFill>
+            <a:schemeClr val="accent1">
+              <a:lumMod val="60000"/>
+              <a:lumOff val="40000"/>
+            </a:schemeClr>
+          </a:solidFill>
+          <a:ln>
+            <a:noFill/>
+          </a:ln>
+        </p:spPr>
+        <p:style>
+          <a:lnRef idx="2">
+            <a:schemeClr val="accent1">
+              <a:shade val="50000"/>
+            </a:schemeClr>
+          </a:lnRef>
+          <a:fillRef idx="1">
+            <a:schemeClr val="accent1"/>
+          </a:fillRef>
+          <a:effectRef idx="0">
+            <a:schemeClr val="accent1"/>
+          </a:effectRef>
+          <a:fontRef idx="minor">
+            <a:schemeClr val="lt1"/>
+          </a:fontRef>
+        </p:style>
+        <p:txBody>
+          <a:bodyPr rtlCol="0" anchor="ctr"/>
+          <a:lstStyle/>
+          <a:p>
+            <a:pPr algn="ctr"/>
+            <a:endParaRPr lang="ko-KR" altLang="en-US"/>
+          </a:p>
+        </p:txBody>
+      </p:sp>
+      <p:sp>
+        <p:nvSpPr>
+          <p:cNvPr id="138" name="직사각형 137">
+            <a:extLst>
+              <a:ext uri="{FF2B5EF4-FFF2-40B4-BE49-F238E27FC236}">
+                <a16:creationId xmlns:a16="http://schemas.microsoft.com/office/drawing/2014/main" id="{7ED98931-0FD4-CCCD-3C87-DCF4621448EB}"/>
+              </a:ext>
+            </a:extLst>
+          </p:cNvPr>
+          <p:cNvSpPr/>
+          <p:nvPr/>
+        </p:nvSpPr>
+        <p:spPr>
+          <a:xfrm rot="5400000">
+            <a:off x="19288438" y="6716472"/>
+            <a:ext cx="173203" cy="154781"/>
+          </a:xfrm>
+          <a:prstGeom prst="rect">
+            <a:avLst/>
+          </a:prstGeom>
+          <a:solidFill>
+            <a:schemeClr val="accent1">
+              <a:lumMod val="60000"/>
+              <a:lumOff val="40000"/>
+            </a:schemeClr>
+          </a:solidFill>
+          <a:ln>
+            <a:noFill/>
+          </a:ln>
+        </p:spPr>
+        <p:style>
+          <a:lnRef idx="2">
+            <a:schemeClr val="accent1">
+              <a:shade val="50000"/>
+            </a:schemeClr>
+          </a:lnRef>
+          <a:fillRef idx="1">
+            <a:schemeClr val="accent1"/>
+          </a:fillRef>
+          <a:effectRef idx="0">
+            <a:schemeClr val="accent1"/>
+          </a:effectRef>
+          <a:fontRef idx="minor">
+            <a:schemeClr val="lt1"/>
+          </a:fontRef>
+        </p:style>
+        <p:txBody>
+          <a:bodyPr rtlCol="0" anchor="ctr"/>
+          <a:lstStyle/>
+          <a:p>
+            <a:pPr algn="ctr"/>
+            <a:endParaRPr lang="ko-KR" altLang="en-US"/>
           </a:p>
         </p:txBody>
       </p:sp>

--- a/oooe 데구.pptx
+++ b/oooe 데구.pptx
@@ -243,7 +243,7 @@
           <a:p>
             <a:fld id="{6FA1AA2F-FC71-4471-BD17-9646155D06AC}" type="datetimeFigureOut">
               <a:rPr lang="ko-KR" altLang="en-US" smtClean="0"/>
-              <a:t>2026-04-25</a:t>
+              <a:t>2026. 4. 28.</a:t>
             </a:fld>
             <a:endParaRPr lang="ko-KR" altLang="en-US"/>
           </a:p>
@@ -413,7 +413,7 @@
           <a:p>
             <a:fld id="{6FA1AA2F-FC71-4471-BD17-9646155D06AC}" type="datetimeFigureOut">
               <a:rPr lang="ko-KR" altLang="en-US" smtClean="0"/>
-              <a:t>2026-04-25</a:t>
+              <a:t>2026. 4. 28.</a:t>
             </a:fld>
             <a:endParaRPr lang="ko-KR" altLang="en-US"/>
           </a:p>
@@ -593,7 +593,7 @@
           <a:p>
             <a:fld id="{6FA1AA2F-FC71-4471-BD17-9646155D06AC}" type="datetimeFigureOut">
               <a:rPr lang="ko-KR" altLang="en-US" smtClean="0"/>
-              <a:t>2026-04-25</a:t>
+              <a:t>2026. 4. 28.</a:t>
             </a:fld>
             <a:endParaRPr lang="ko-KR" altLang="en-US"/>
           </a:p>
@@ -763,7 +763,7 @@
           <a:p>
             <a:fld id="{6FA1AA2F-FC71-4471-BD17-9646155D06AC}" type="datetimeFigureOut">
               <a:rPr lang="ko-KR" altLang="en-US" smtClean="0"/>
-              <a:t>2026-04-25</a:t>
+              <a:t>2026. 4. 28.</a:t>
             </a:fld>
             <a:endParaRPr lang="ko-KR" altLang="en-US"/>
           </a:p>
@@ -1009,7 +1009,7 @@
           <a:p>
             <a:fld id="{6FA1AA2F-FC71-4471-BD17-9646155D06AC}" type="datetimeFigureOut">
               <a:rPr lang="ko-KR" altLang="en-US" smtClean="0"/>
-              <a:t>2026-04-25</a:t>
+              <a:t>2026. 4. 28.</a:t>
             </a:fld>
             <a:endParaRPr lang="ko-KR" altLang="en-US"/>
           </a:p>
@@ -1241,7 +1241,7 @@
           <a:p>
             <a:fld id="{6FA1AA2F-FC71-4471-BD17-9646155D06AC}" type="datetimeFigureOut">
               <a:rPr lang="ko-KR" altLang="en-US" smtClean="0"/>
-              <a:t>2026-04-25</a:t>
+              <a:t>2026. 4. 28.</a:t>
             </a:fld>
             <a:endParaRPr lang="ko-KR" altLang="en-US"/>
           </a:p>
@@ -1608,7 +1608,7 @@
           <a:p>
             <a:fld id="{6FA1AA2F-FC71-4471-BD17-9646155D06AC}" type="datetimeFigureOut">
               <a:rPr lang="ko-KR" altLang="en-US" smtClean="0"/>
-              <a:t>2026-04-25</a:t>
+              <a:t>2026. 4. 28.</a:t>
             </a:fld>
             <a:endParaRPr lang="ko-KR" altLang="en-US"/>
           </a:p>
@@ -1726,7 +1726,7 @@
           <a:p>
             <a:fld id="{6FA1AA2F-FC71-4471-BD17-9646155D06AC}" type="datetimeFigureOut">
               <a:rPr lang="ko-KR" altLang="en-US" smtClean="0"/>
-              <a:t>2026-04-25</a:t>
+              <a:t>2026. 4. 28.</a:t>
             </a:fld>
             <a:endParaRPr lang="ko-KR" altLang="en-US"/>
           </a:p>
@@ -1821,7 +1821,7 @@
           <a:p>
             <a:fld id="{6FA1AA2F-FC71-4471-BD17-9646155D06AC}" type="datetimeFigureOut">
               <a:rPr lang="ko-KR" altLang="en-US" smtClean="0"/>
-              <a:t>2026-04-25</a:t>
+              <a:t>2026. 4. 28.</a:t>
             </a:fld>
             <a:endParaRPr lang="ko-KR" altLang="en-US"/>
           </a:p>
@@ -2098,7 +2098,7 @@
           <a:p>
             <a:fld id="{6FA1AA2F-FC71-4471-BD17-9646155D06AC}" type="datetimeFigureOut">
               <a:rPr lang="ko-KR" altLang="en-US" smtClean="0"/>
-              <a:t>2026-04-25</a:t>
+              <a:t>2026. 4. 28.</a:t>
             </a:fld>
             <a:endParaRPr lang="ko-KR" altLang="en-US"/>
           </a:p>
@@ -2355,7 +2355,7 @@
           <a:p>
             <a:fld id="{6FA1AA2F-FC71-4471-BD17-9646155D06AC}" type="datetimeFigureOut">
               <a:rPr lang="ko-KR" altLang="en-US" smtClean="0"/>
-              <a:t>2026-04-25</a:t>
+              <a:t>2026. 4. 28.</a:t>
             </a:fld>
             <a:endParaRPr lang="ko-KR" altLang="en-US"/>
           </a:p>
@@ -2568,7 +2568,7 @@
           <a:p>
             <a:fld id="{6FA1AA2F-FC71-4471-BD17-9646155D06AC}" type="datetimeFigureOut">
               <a:rPr lang="ko-KR" altLang="en-US" smtClean="0"/>
-              <a:t>2026-04-25</a:t>
+              <a:t>2026. 4. 28.</a:t>
             </a:fld>
             <a:endParaRPr lang="ko-KR" altLang="en-US"/>
           </a:p>
@@ -20384,7 +20384,7 @@
           <p:nvPr>
             <p:extLst>
               <p:ext uri="{D42A27DB-BD31-4B8C-83A1-F6EECF244321}">
-                <p14:modId xmlns:p14="http://schemas.microsoft.com/office/powerpoint/2010/main" val="3754699364"/>
+                <p14:modId xmlns:p14="http://schemas.microsoft.com/office/powerpoint/2010/main" val="3219906899"/>
               </p:ext>
             </p:extLst>
           </p:nvPr>
@@ -22649,6 +22649,342 @@
           </a:p>
         </p:txBody>
       </p:sp>
+      <p:sp>
+        <p:nvSpPr>
+          <p:cNvPr id="3" name="직사각형 2">
+            <a:extLst>
+              <a:ext uri="{FF2B5EF4-FFF2-40B4-BE49-F238E27FC236}">
+                <a16:creationId xmlns:a16="http://schemas.microsoft.com/office/drawing/2014/main" id="{487A1F49-3E7D-1BD6-58C2-EC4A5553F947}"/>
+              </a:ext>
+            </a:extLst>
+          </p:cNvPr>
+          <p:cNvSpPr/>
+          <p:nvPr/>
+        </p:nvSpPr>
+        <p:spPr>
+          <a:xfrm rot="5400000">
+            <a:off x="6947073" y="15417811"/>
+            <a:ext cx="1064164" cy="180640"/>
+          </a:xfrm>
+          <a:prstGeom prst="rect">
+            <a:avLst/>
+          </a:prstGeom>
+          <a:solidFill>
+            <a:schemeClr val="accent1">
+              <a:lumMod val="60000"/>
+              <a:lumOff val="40000"/>
+            </a:schemeClr>
+          </a:solidFill>
+          <a:ln>
+            <a:noFill/>
+          </a:ln>
+        </p:spPr>
+        <p:style>
+          <a:lnRef idx="2">
+            <a:schemeClr val="accent1">
+              <a:shade val="50000"/>
+            </a:schemeClr>
+          </a:lnRef>
+          <a:fillRef idx="1">
+            <a:schemeClr val="accent1"/>
+          </a:fillRef>
+          <a:effectRef idx="0">
+            <a:schemeClr val="accent1"/>
+          </a:effectRef>
+          <a:fontRef idx="minor">
+            <a:schemeClr val="lt1"/>
+          </a:fontRef>
+        </p:style>
+        <p:txBody>
+          <a:bodyPr rtlCol="0" anchor="ctr"/>
+          <a:lstStyle/>
+          <a:p>
+            <a:pPr algn="ctr"/>
+            <a:endParaRPr lang="ko-KR" altLang="en-US"/>
+          </a:p>
+        </p:txBody>
+      </p:sp>
+      <p:graphicFrame>
+        <p:nvGraphicFramePr>
+          <p:cNvPr id="97" name="표 96">
+            <a:extLst>
+              <a:ext uri="{FF2B5EF4-FFF2-40B4-BE49-F238E27FC236}">
+                <a16:creationId xmlns:a16="http://schemas.microsoft.com/office/drawing/2014/main" id="{538A1420-E1E3-8D6C-A631-692C470D8F0D}"/>
+              </a:ext>
+            </a:extLst>
+          </p:cNvPr>
+          <p:cNvGraphicFramePr>
+            <a:graphicFrameLocks noGrp="1"/>
+          </p:cNvGraphicFramePr>
+          <p:nvPr>
+            <p:extLst>
+              <p:ext uri="{D42A27DB-BD31-4B8C-83A1-F6EECF244321}">
+                <p14:modId xmlns:p14="http://schemas.microsoft.com/office/powerpoint/2010/main" val="1826870521"/>
+              </p:ext>
+            </p:extLst>
+          </p:nvPr>
+        </p:nvGraphicFramePr>
+        <p:xfrm>
+          <a:off x="7048375" y="14662034"/>
+          <a:ext cx="890256" cy="313891"/>
+        </p:xfrm>
+        <a:graphic>
+          <a:graphicData uri="http://schemas.openxmlformats.org/drawingml/2006/table">
+            <a:tbl>
+              <a:tblPr firstRow="1" bandRow="1">
+                <a:tableStyleId>{5C22544A-7EE6-4342-B048-85BDC9FD1C3A}</a:tableStyleId>
+              </a:tblPr>
+              <a:tblGrid>
+                <a:gridCol w="890256">
+                  <a:extLst>
+                    <a:ext uri="{9D8B030D-6E8A-4147-A177-3AD203B41FA5}">
+                      <a16:colId xmlns:a16="http://schemas.microsoft.com/office/drawing/2014/main" val="3952378705"/>
+                    </a:ext>
+                  </a:extLst>
+                </a:gridCol>
+              </a:tblGrid>
+              <a:tr h="313891">
+                <a:tc>
+                  <a:txBody>
+                    <a:bodyPr/>
+                    <a:lstStyle/>
+                    <a:p>
+                      <a:pPr algn="ctr" latinLnBrk="1"/>
+                      <a:r>
+                        <a:rPr lang="en-US" altLang="ko-KR" sz="1200" dirty="0" err="1">
+                          <a:solidFill>
+                            <a:sysClr val="windowText" lastClr="000000"/>
+                          </a:solidFill>
+                        </a:rPr>
+                        <a:t>new_PC</a:t>
+                      </a:r>
+                      <a:endParaRPr lang="ko-KR" altLang="en-US" sz="1200" dirty="0">
+                        <a:solidFill>
+                          <a:sysClr val="windowText" lastClr="000000"/>
+                        </a:solidFill>
+                      </a:endParaRPr>
+                    </a:p>
+                  </a:txBody>
+                  <a:tcPr marL="91438" marR="91438" marT="45719" marB="45719" anchor="ctr">
+                    <a:lnL w="12700" cap="flat" cmpd="sng" algn="ctr">
+                      <a:solidFill>
+                        <a:schemeClr val="tx1"/>
+                      </a:solidFill>
+                      <a:prstDash val="solid"/>
+                      <a:round/>
+                      <a:headEnd type="none" w="med" len="med"/>
+                      <a:tailEnd type="none" w="med" len="med"/>
+                    </a:lnL>
+                    <a:lnR w="12700" cap="flat" cmpd="sng" algn="ctr">
+                      <a:solidFill>
+                        <a:schemeClr val="tx1"/>
+                      </a:solidFill>
+                      <a:prstDash val="solid"/>
+                      <a:round/>
+                      <a:headEnd type="none" w="med" len="med"/>
+                      <a:tailEnd type="none" w="med" len="med"/>
+                    </a:lnR>
+                    <a:lnT w="12700" cap="flat" cmpd="sng" algn="ctr">
+                      <a:solidFill>
+                        <a:schemeClr val="tx1"/>
+                      </a:solidFill>
+                      <a:prstDash val="solid"/>
+                      <a:round/>
+                      <a:headEnd type="none" w="med" len="med"/>
+                      <a:tailEnd type="none" w="med" len="med"/>
+                    </a:lnT>
+                    <a:lnB w="12700" cap="flat" cmpd="sng" algn="ctr">
+                      <a:solidFill>
+                        <a:schemeClr val="tx1"/>
+                      </a:solidFill>
+                      <a:prstDash val="solid"/>
+                      <a:round/>
+                      <a:headEnd type="none" w="med" len="med"/>
+                      <a:tailEnd type="none" w="med" len="med"/>
+                    </a:lnB>
+                    <a:solidFill>
+                      <a:schemeClr val="bg1"/>
+                    </a:solidFill>
+                  </a:tcPr>
+                </a:tc>
+                <a:extLst>
+                  <a:ext uri="{0D108BD9-81ED-4DB2-BD59-A6C34878D82A}">
+                    <a16:rowId xmlns:a16="http://schemas.microsoft.com/office/drawing/2014/main" val="1210047444"/>
+                  </a:ext>
+                </a:extLst>
+              </a:tr>
+            </a:tbl>
+          </a:graphicData>
+        </a:graphic>
+      </p:graphicFrame>
+      <p:sp>
+        <p:nvSpPr>
+          <p:cNvPr id="99" name="직사각형 98">
+            <a:extLst>
+              <a:ext uri="{FF2B5EF4-FFF2-40B4-BE49-F238E27FC236}">
+                <a16:creationId xmlns:a16="http://schemas.microsoft.com/office/drawing/2014/main" id="{75CE9054-C615-6F2A-6472-E8DBC3A0BB63}"/>
+              </a:ext>
+            </a:extLst>
+          </p:cNvPr>
+          <p:cNvSpPr/>
+          <p:nvPr/>
+        </p:nvSpPr>
+        <p:spPr>
+          <a:xfrm rot="5400000">
+            <a:off x="12297670" y="15417811"/>
+            <a:ext cx="1064164" cy="180640"/>
+          </a:xfrm>
+          <a:prstGeom prst="rect">
+            <a:avLst/>
+          </a:prstGeom>
+          <a:solidFill>
+            <a:schemeClr val="accent1">
+              <a:lumMod val="60000"/>
+              <a:lumOff val="40000"/>
+            </a:schemeClr>
+          </a:solidFill>
+          <a:ln>
+            <a:noFill/>
+          </a:ln>
+        </p:spPr>
+        <p:style>
+          <a:lnRef idx="2">
+            <a:schemeClr val="accent1">
+              <a:shade val="50000"/>
+            </a:schemeClr>
+          </a:lnRef>
+          <a:fillRef idx="1">
+            <a:schemeClr val="accent1"/>
+          </a:fillRef>
+          <a:effectRef idx="0">
+            <a:schemeClr val="accent1"/>
+          </a:effectRef>
+          <a:fontRef idx="minor">
+            <a:schemeClr val="lt1"/>
+          </a:fontRef>
+        </p:style>
+        <p:txBody>
+          <a:bodyPr rtlCol="0" anchor="ctr"/>
+          <a:lstStyle/>
+          <a:p>
+            <a:pPr algn="ctr"/>
+            <a:endParaRPr lang="ko-KR" altLang="en-US"/>
+          </a:p>
+        </p:txBody>
+      </p:sp>
+      <p:graphicFrame>
+        <p:nvGraphicFramePr>
+          <p:cNvPr id="102" name="표 101">
+            <a:extLst>
+              <a:ext uri="{FF2B5EF4-FFF2-40B4-BE49-F238E27FC236}">
+                <a16:creationId xmlns:a16="http://schemas.microsoft.com/office/drawing/2014/main" id="{39342F02-4CD5-C0D0-E336-E8C88CD5A59C}"/>
+              </a:ext>
+            </a:extLst>
+          </p:cNvPr>
+          <p:cNvGraphicFramePr>
+            <a:graphicFrameLocks noGrp="1"/>
+          </p:cNvGraphicFramePr>
+          <p:nvPr>
+            <p:extLst>
+              <p:ext uri="{D42A27DB-BD31-4B8C-83A1-F6EECF244321}">
+                <p14:modId xmlns:p14="http://schemas.microsoft.com/office/powerpoint/2010/main" val="1826870521"/>
+              </p:ext>
+            </p:extLst>
+          </p:nvPr>
+        </p:nvGraphicFramePr>
+        <p:xfrm>
+          <a:off x="12398972" y="14662034"/>
+          <a:ext cx="890256" cy="313891"/>
+        </p:xfrm>
+        <a:graphic>
+          <a:graphicData uri="http://schemas.openxmlformats.org/drawingml/2006/table">
+            <a:tbl>
+              <a:tblPr firstRow="1" bandRow="1">
+                <a:tableStyleId>{5C22544A-7EE6-4342-B048-85BDC9FD1C3A}</a:tableStyleId>
+              </a:tblPr>
+              <a:tblGrid>
+                <a:gridCol w="890256">
+                  <a:extLst>
+                    <a:ext uri="{9D8B030D-6E8A-4147-A177-3AD203B41FA5}">
+                      <a16:colId xmlns:a16="http://schemas.microsoft.com/office/drawing/2014/main" val="3952378705"/>
+                    </a:ext>
+                  </a:extLst>
+                </a:gridCol>
+              </a:tblGrid>
+              <a:tr h="313891">
+                <a:tc>
+                  <a:txBody>
+                    <a:bodyPr/>
+                    <a:lstStyle/>
+                    <a:p>
+                      <a:pPr algn="ctr" latinLnBrk="1"/>
+                      <a:r>
+                        <a:rPr lang="en-US" altLang="ko-KR" sz="1200" dirty="0" err="1">
+                          <a:solidFill>
+                            <a:sysClr val="windowText" lastClr="000000"/>
+                          </a:solidFill>
+                        </a:rPr>
+                        <a:t>new_PC</a:t>
+                      </a:r>
+                      <a:endParaRPr lang="ko-KR" altLang="en-US" sz="1200" dirty="0">
+                        <a:solidFill>
+                          <a:sysClr val="windowText" lastClr="000000"/>
+                        </a:solidFill>
+                      </a:endParaRPr>
+                    </a:p>
+                  </a:txBody>
+                  <a:tcPr marL="91438" marR="91438" marT="45719" marB="45719" anchor="ctr">
+                    <a:lnL w="12700" cap="flat" cmpd="sng" algn="ctr">
+                      <a:solidFill>
+                        <a:schemeClr val="tx1"/>
+                      </a:solidFill>
+                      <a:prstDash val="solid"/>
+                      <a:round/>
+                      <a:headEnd type="none" w="med" len="med"/>
+                      <a:tailEnd type="none" w="med" len="med"/>
+                    </a:lnL>
+                    <a:lnR w="12700" cap="flat" cmpd="sng" algn="ctr">
+                      <a:solidFill>
+                        <a:schemeClr val="tx1"/>
+                      </a:solidFill>
+                      <a:prstDash val="solid"/>
+                      <a:round/>
+                      <a:headEnd type="none" w="med" len="med"/>
+                      <a:tailEnd type="none" w="med" len="med"/>
+                    </a:lnR>
+                    <a:lnT w="12700" cap="flat" cmpd="sng" algn="ctr">
+                      <a:solidFill>
+                        <a:schemeClr val="tx1"/>
+                      </a:solidFill>
+                      <a:prstDash val="solid"/>
+                      <a:round/>
+                      <a:headEnd type="none" w="med" len="med"/>
+                      <a:tailEnd type="none" w="med" len="med"/>
+                    </a:lnT>
+                    <a:lnB w="12700" cap="flat" cmpd="sng" algn="ctr">
+                      <a:solidFill>
+                        <a:schemeClr val="tx1"/>
+                      </a:solidFill>
+                      <a:prstDash val="solid"/>
+                      <a:round/>
+                      <a:headEnd type="none" w="med" len="med"/>
+                      <a:tailEnd type="none" w="med" len="med"/>
+                    </a:lnB>
+                    <a:solidFill>
+                      <a:schemeClr val="bg1"/>
+                    </a:solidFill>
+                  </a:tcPr>
+                </a:tc>
+                <a:extLst>
+                  <a:ext uri="{0D108BD9-81ED-4DB2-BD59-A6C34878D82A}">
+                    <a16:rowId xmlns:a16="http://schemas.microsoft.com/office/drawing/2014/main" val="1210047444"/>
+                  </a:ext>
+                </a:extLst>
+              </a:tr>
+            </a:tbl>
+          </a:graphicData>
+        </a:graphic>
+      </p:graphicFrame>
     </p:spTree>
     <p:extLst>
       <p:ext uri="{BB962C8B-B14F-4D97-AF65-F5344CB8AC3E}">

--- a/oooe 데구.pptx
+++ b/oooe 데구.pptx
@@ -243,7 +243,7 @@
           <a:p>
             <a:fld id="{6FA1AA2F-FC71-4471-BD17-9646155D06AC}" type="datetimeFigureOut">
               <a:rPr lang="ko-KR" altLang="en-US" smtClean="0"/>
-              <a:t>2026. 4. 28.</a:t>
+              <a:t>2026. 5. 1.</a:t>
             </a:fld>
             <a:endParaRPr lang="ko-KR" altLang="en-US"/>
           </a:p>
@@ -413,7 +413,7 @@
           <a:p>
             <a:fld id="{6FA1AA2F-FC71-4471-BD17-9646155D06AC}" type="datetimeFigureOut">
               <a:rPr lang="ko-KR" altLang="en-US" smtClean="0"/>
-              <a:t>2026. 4. 28.</a:t>
+              <a:t>2026. 5. 1.</a:t>
             </a:fld>
             <a:endParaRPr lang="ko-KR" altLang="en-US"/>
           </a:p>
@@ -593,7 +593,7 @@
           <a:p>
             <a:fld id="{6FA1AA2F-FC71-4471-BD17-9646155D06AC}" type="datetimeFigureOut">
               <a:rPr lang="ko-KR" altLang="en-US" smtClean="0"/>
-              <a:t>2026. 4. 28.</a:t>
+              <a:t>2026. 5. 1.</a:t>
             </a:fld>
             <a:endParaRPr lang="ko-KR" altLang="en-US"/>
           </a:p>
@@ -763,7 +763,7 @@
           <a:p>
             <a:fld id="{6FA1AA2F-FC71-4471-BD17-9646155D06AC}" type="datetimeFigureOut">
               <a:rPr lang="ko-KR" altLang="en-US" smtClean="0"/>
-              <a:t>2026. 4. 28.</a:t>
+              <a:t>2026. 5. 1.</a:t>
             </a:fld>
             <a:endParaRPr lang="ko-KR" altLang="en-US"/>
           </a:p>
@@ -1009,7 +1009,7 @@
           <a:p>
             <a:fld id="{6FA1AA2F-FC71-4471-BD17-9646155D06AC}" type="datetimeFigureOut">
               <a:rPr lang="ko-KR" altLang="en-US" smtClean="0"/>
-              <a:t>2026. 4. 28.</a:t>
+              <a:t>2026. 5. 1.</a:t>
             </a:fld>
             <a:endParaRPr lang="ko-KR" altLang="en-US"/>
           </a:p>
@@ -1241,7 +1241,7 @@
           <a:p>
             <a:fld id="{6FA1AA2F-FC71-4471-BD17-9646155D06AC}" type="datetimeFigureOut">
               <a:rPr lang="ko-KR" altLang="en-US" smtClean="0"/>
-              <a:t>2026. 4. 28.</a:t>
+              <a:t>2026. 5. 1.</a:t>
             </a:fld>
             <a:endParaRPr lang="ko-KR" altLang="en-US"/>
           </a:p>
@@ -1608,7 +1608,7 @@
           <a:p>
             <a:fld id="{6FA1AA2F-FC71-4471-BD17-9646155D06AC}" type="datetimeFigureOut">
               <a:rPr lang="ko-KR" altLang="en-US" smtClean="0"/>
-              <a:t>2026. 4. 28.</a:t>
+              <a:t>2026. 5. 1.</a:t>
             </a:fld>
             <a:endParaRPr lang="ko-KR" altLang="en-US"/>
           </a:p>
@@ -1726,7 +1726,7 @@
           <a:p>
             <a:fld id="{6FA1AA2F-FC71-4471-BD17-9646155D06AC}" type="datetimeFigureOut">
               <a:rPr lang="ko-KR" altLang="en-US" smtClean="0"/>
-              <a:t>2026. 4. 28.</a:t>
+              <a:t>2026. 5. 1.</a:t>
             </a:fld>
             <a:endParaRPr lang="ko-KR" altLang="en-US"/>
           </a:p>
@@ -1821,7 +1821,7 @@
           <a:p>
             <a:fld id="{6FA1AA2F-FC71-4471-BD17-9646155D06AC}" type="datetimeFigureOut">
               <a:rPr lang="ko-KR" altLang="en-US" smtClean="0"/>
-              <a:t>2026. 4. 28.</a:t>
+              <a:t>2026. 5. 1.</a:t>
             </a:fld>
             <a:endParaRPr lang="ko-KR" altLang="en-US"/>
           </a:p>
@@ -2098,7 +2098,7 @@
           <a:p>
             <a:fld id="{6FA1AA2F-FC71-4471-BD17-9646155D06AC}" type="datetimeFigureOut">
               <a:rPr lang="ko-KR" altLang="en-US" smtClean="0"/>
-              <a:t>2026. 4. 28.</a:t>
+              <a:t>2026. 5. 1.</a:t>
             </a:fld>
             <a:endParaRPr lang="ko-KR" altLang="en-US"/>
           </a:p>
@@ -2355,7 +2355,7 @@
           <a:p>
             <a:fld id="{6FA1AA2F-FC71-4471-BD17-9646155D06AC}" type="datetimeFigureOut">
               <a:rPr lang="ko-KR" altLang="en-US" smtClean="0"/>
-              <a:t>2026. 4. 28.</a:t>
+              <a:t>2026. 5. 1.</a:t>
             </a:fld>
             <a:endParaRPr lang="ko-KR" altLang="en-US"/>
           </a:p>
@@ -2568,7 +2568,7 @@
           <a:p>
             <a:fld id="{6FA1AA2F-FC71-4471-BD17-9646155D06AC}" type="datetimeFigureOut">
               <a:rPr lang="ko-KR" altLang="en-US" smtClean="0"/>
-              <a:t>2026. 4. 28.</a:t>
+              <a:t>2026. 5. 1.</a:t>
             </a:fld>
             <a:endParaRPr lang="ko-KR" altLang="en-US"/>
           </a:p>
@@ -18425,7 +18425,7 @@
         </p:nvSpPr>
         <p:spPr>
           <a:xfrm rot="5400000">
-            <a:off x="1502074" y="15417811"/>
+            <a:off x="535331" y="15417811"/>
             <a:ext cx="1064164" cy="180640"/>
           </a:xfrm>
           <a:prstGeom prst="rect">
@@ -18480,8 +18480,8 @@
         </p:nvSpPr>
         <p:spPr>
           <a:xfrm>
-            <a:off x="1944584" y="15855427"/>
-            <a:ext cx="24863529" cy="180640"/>
+            <a:off x="993228" y="15855427"/>
+            <a:ext cx="25814885" cy="180640"/>
           </a:xfrm>
           <a:prstGeom prst="rect">
             <a:avLst/>
@@ -20167,7 +20167,13 @@
           <p:cNvGraphicFramePr>
             <a:graphicFrameLocks noGrp="1"/>
           </p:cNvGraphicFramePr>
-          <p:nvPr/>
+          <p:nvPr>
+            <p:extLst>
+              <p:ext uri="{D42A27DB-BD31-4B8C-83A1-F6EECF244321}">
+                <p14:modId xmlns:p14="http://schemas.microsoft.com/office/powerpoint/2010/main" val="1660774496"/>
+              </p:ext>
+            </p:extLst>
+          </p:nvPr>
         </p:nvGraphicFramePr>
         <p:xfrm>
           <a:off x="13894371" y="14662157"/>
@@ -20384,13 +20390,13 @@
           <p:nvPr>
             <p:extLst>
               <p:ext uri="{D42A27DB-BD31-4B8C-83A1-F6EECF244321}">
-                <p14:modId xmlns:p14="http://schemas.microsoft.com/office/powerpoint/2010/main" val="3219906899"/>
+                <p14:modId xmlns:p14="http://schemas.microsoft.com/office/powerpoint/2010/main" val="2946425558"/>
               </p:ext>
             </p:extLst>
           </p:nvPr>
         </p:nvGraphicFramePr>
         <p:xfrm>
-          <a:off x="1603376" y="14662034"/>
+          <a:off x="636633" y="14662034"/>
           <a:ext cx="890256" cy="313891"/>
         </p:xfrm>
         <a:graphic>
@@ -22651,174 +22657,6 @@
       </p:sp>
       <p:sp>
         <p:nvSpPr>
-          <p:cNvPr id="3" name="직사각형 2">
-            <a:extLst>
-              <a:ext uri="{FF2B5EF4-FFF2-40B4-BE49-F238E27FC236}">
-                <a16:creationId xmlns:a16="http://schemas.microsoft.com/office/drawing/2014/main" id="{487A1F49-3E7D-1BD6-58C2-EC4A5553F947}"/>
-              </a:ext>
-            </a:extLst>
-          </p:cNvPr>
-          <p:cNvSpPr/>
-          <p:nvPr/>
-        </p:nvSpPr>
-        <p:spPr>
-          <a:xfrm rot="5400000">
-            <a:off x="6947073" y="15417811"/>
-            <a:ext cx="1064164" cy="180640"/>
-          </a:xfrm>
-          <a:prstGeom prst="rect">
-            <a:avLst/>
-          </a:prstGeom>
-          <a:solidFill>
-            <a:schemeClr val="accent1">
-              <a:lumMod val="60000"/>
-              <a:lumOff val="40000"/>
-            </a:schemeClr>
-          </a:solidFill>
-          <a:ln>
-            <a:noFill/>
-          </a:ln>
-        </p:spPr>
-        <p:style>
-          <a:lnRef idx="2">
-            <a:schemeClr val="accent1">
-              <a:shade val="50000"/>
-            </a:schemeClr>
-          </a:lnRef>
-          <a:fillRef idx="1">
-            <a:schemeClr val="accent1"/>
-          </a:fillRef>
-          <a:effectRef idx="0">
-            <a:schemeClr val="accent1"/>
-          </a:effectRef>
-          <a:fontRef idx="minor">
-            <a:schemeClr val="lt1"/>
-          </a:fontRef>
-        </p:style>
-        <p:txBody>
-          <a:bodyPr rtlCol="0" anchor="ctr"/>
-          <a:lstStyle/>
-          <a:p>
-            <a:pPr algn="ctr"/>
-            <a:endParaRPr lang="ko-KR" altLang="en-US"/>
-          </a:p>
-        </p:txBody>
-      </p:sp>
-      <p:graphicFrame>
-        <p:nvGraphicFramePr>
-          <p:cNvPr id="97" name="표 96">
-            <a:extLst>
-              <a:ext uri="{FF2B5EF4-FFF2-40B4-BE49-F238E27FC236}">
-                <a16:creationId xmlns:a16="http://schemas.microsoft.com/office/drawing/2014/main" id="{538A1420-E1E3-8D6C-A631-692C470D8F0D}"/>
-              </a:ext>
-            </a:extLst>
-          </p:cNvPr>
-          <p:cNvGraphicFramePr>
-            <a:graphicFrameLocks noGrp="1"/>
-          </p:cNvGraphicFramePr>
-          <p:nvPr>
-            <p:extLst>
-              <p:ext uri="{D42A27DB-BD31-4B8C-83A1-F6EECF244321}">
-                <p14:modId xmlns:p14="http://schemas.microsoft.com/office/powerpoint/2010/main" val="1826870521"/>
-              </p:ext>
-            </p:extLst>
-          </p:nvPr>
-        </p:nvGraphicFramePr>
-        <p:xfrm>
-          <a:off x="7048375" y="14662034"/>
-          <a:ext cx="890256" cy="313891"/>
-        </p:xfrm>
-        <a:graphic>
-          <a:graphicData uri="http://schemas.openxmlformats.org/drawingml/2006/table">
-            <a:tbl>
-              <a:tblPr firstRow="1" bandRow="1">
-                <a:tableStyleId>{5C22544A-7EE6-4342-B048-85BDC9FD1C3A}</a:tableStyleId>
-              </a:tblPr>
-              <a:tblGrid>
-                <a:gridCol w="890256">
-                  <a:extLst>
-                    <a:ext uri="{9D8B030D-6E8A-4147-A177-3AD203B41FA5}">
-                      <a16:colId xmlns:a16="http://schemas.microsoft.com/office/drawing/2014/main" val="3952378705"/>
-                    </a:ext>
-                  </a:extLst>
-                </a:gridCol>
-              </a:tblGrid>
-              <a:tr h="313891">
-                <a:tc>
-                  <a:txBody>
-                    <a:bodyPr/>
-                    <a:lstStyle/>
-                    <a:p>
-                      <a:pPr algn="ctr" latinLnBrk="1"/>
-                      <a:r>
-                        <a:rPr lang="en-US" altLang="ko-KR" sz="1200" dirty="0" err="1">
-                          <a:solidFill>
-                            <a:sysClr val="windowText" lastClr="000000"/>
-                          </a:solidFill>
-                        </a:rPr>
-                        <a:t>new_PC</a:t>
-                      </a:r>
-                      <a:endParaRPr lang="ko-KR" altLang="en-US" sz="1200" dirty="0">
-                        <a:solidFill>
-                          <a:sysClr val="windowText" lastClr="000000"/>
-                        </a:solidFill>
-                      </a:endParaRPr>
-                    </a:p>
-                  </a:txBody>
-                  <a:tcPr marL="91438" marR="91438" marT="45719" marB="45719" anchor="ctr">
-                    <a:lnL w="12700" cap="flat" cmpd="sng" algn="ctr">
-                      <a:solidFill>
-                        <a:schemeClr val="tx1"/>
-                      </a:solidFill>
-                      <a:prstDash val="solid"/>
-                      <a:round/>
-                      <a:headEnd type="none" w="med" len="med"/>
-                      <a:tailEnd type="none" w="med" len="med"/>
-                    </a:lnL>
-                    <a:lnR w="12700" cap="flat" cmpd="sng" algn="ctr">
-                      <a:solidFill>
-                        <a:schemeClr val="tx1"/>
-                      </a:solidFill>
-                      <a:prstDash val="solid"/>
-                      <a:round/>
-                      <a:headEnd type="none" w="med" len="med"/>
-                      <a:tailEnd type="none" w="med" len="med"/>
-                    </a:lnR>
-                    <a:lnT w="12700" cap="flat" cmpd="sng" algn="ctr">
-                      <a:solidFill>
-                        <a:schemeClr val="tx1"/>
-                      </a:solidFill>
-                      <a:prstDash val="solid"/>
-                      <a:round/>
-                      <a:headEnd type="none" w="med" len="med"/>
-                      <a:tailEnd type="none" w="med" len="med"/>
-                    </a:lnT>
-                    <a:lnB w="12700" cap="flat" cmpd="sng" algn="ctr">
-                      <a:solidFill>
-                        <a:schemeClr val="tx1"/>
-                      </a:solidFill>
-                      <a:prstDash val="solid"/>
-                      <a:round/>
-                      <a:headEnd type="none" w="med" len="med"/>
-                      <a:tailEnd type="none" w="med" len="med"/>
-                    </a:lnB>
-                    <a:solidFill>
-                      <a:schemeClr val="bg1"/>
-                    </a:solidFill>
-                  </a:tcPr>
-                </a:tc>
-                <a:extLst>
-                  <a:ext uri="{0D108BD9-81ED-4DB2-BD59-A6C34878D82A}">
-                    <a16:rowId xmlns:a16="http://schemas.microsoft.com/office/drawing/2014/main" val="1210047444"/>
-                  </a:ext>
-                </a:extLst>
-              </a:tr>
-            </a:tbl>
-          </a:graphicData>
-        </a:graphic>
-      </p:graphicFrame>
-      <p:sp>
-        <p:nvSpPr>
           <p:cNvPr id="99" name="직사각형 98">
             <a:extLst>
               <a:ext uri="{FF2B5EF4-FFF2-40B4-BE49-F238E27FC236}">
@@ -22874,10 +22712,10 @@
       </p:sp>
       <p:graphicFrame>
         <p:nvGraphicFramePr>
-          <p:cNvPr id="102" name="표 101">
+          <p:cNvPr id="116" name="표 115">
             <a:extLst>
               <a:ext uri="{FF2B5EF4-FFF2-40B4-BE49-F238E27FC236}">
-                <a16:creationId xmlns:a16="http://schemas.microsoft.com/office/drawing/2014/main" id="{39342F02-4CD5-C0D0-E336-E8C88CD5A59C}"/>
+                <a16:creationId xmlns:a16="http://schemas.microsoft.com/office/drawing/2014/main" id="{8EB80418-6E2B-D05E-8778-8B967A8B1E77}"/>
               </a:ext>
             </a:extLst>
           </p:cNvPr>
@@ -22887,14 +22725,14 @@
           <p:nvPr>
             <p:extLst>
               <p:ext uri="{D42A27DB-BD31-4B8C-83A1-F6EECF244321}">
-                <p14:modId xmlns:p14="http://schemas.microsoft.com/office/powerpoint/2010/main" val="1826870521"/>
+                <p14:modId xmlns:p14="http://schemas.microsoft.com/office/powerpoint/2010/main" val="3371558099"/>
               </p:ext>
             </p:extLst>
           </p:nvPr>
         </p:nvGraphicFramePr>
         <p:xfrm>
-          <a:off x="12398972" y="14662034"/>
-          <a:ext cx="890256" cy="313891"/>
+          <a:off x="12616594" y="14662157"/>
+          <a:ext cx="441509" cy="313891"/>
         </p:xfrm>
         <a:graphic>
           <a:graphicData uri="http://schemas.openxmlformats.org/drawingml/2006/table">
@@ -22903,10 +22741,10 @@
                 <a:tableStyleId>{5C22544A-7EE6-4342-B048-85BDC9FD1C3A}</a:tableStyleId>
               </a:tblPr>
               <a:tblGrid>
-                <a:gridCol w="890256">
+                <a:gridCol w="441509">
                   <a:extLst>
                     <a:ext uri="{9D8B030D-6E8A-4147-A177-3AD203B41FA5}">
-                      <a16:colId xmlns:a16="http://schemas.microsoft.com/office/drawing/2014/main" val="3952378705"/>
+                      <a16:colId xmlns:a16="http://schemas.microsoft.com/office/drawing/2014/main" val="3245210431"/>
                     </a:ext>
                   </a:extLst>
                 </a:gridCol>
@@ -22919,12 +22757,12 @@
                     <a:p>
                       <a:pPr algn="ctr" latinLnBrk="1"/>
                       <a:r>
-                        <a:rPr lang="en-US" altLang="ko-KR" sz="1200" dirty="0" err="1">
+                        <a:rPr lang="en-US" altLang="ko-KR" sz="1200" dirty="0">
                           <a:solidFill>
                             <a:sysClr val="windowText" lastClr="000000"/>
                           </a:solidFill>
                         </a:rPr>
-                        <a:t>new_PC</a:t>
+                        <a:t>PC</a:t>
                       </a:r>
                       <a:endParaRPr lang="ko-KR" altLang="en-US" sz="1200" dirty="0">
                         <a:solidFill>
@@ -22933,7 +22771,7 @@
                       </a:endParaRPr>
                     </a:p>
                   </a:txBody>
-                  <a:tcPr marL="91438" marR="91438" marT="45719" marB="45719" anchor="ctr">
+                  <a:tcPr marL="62453" marR="62453" marT="45719" marB="45719" anchor="ctr">
                     <a:lnL w="12700" cap="flat" cmpd="sng" algn="ctr">
                       <a:solidFill>
                         <a:schemeClr val="tx1"/>
@@ -22977,7 +22815,343 @@
                 </a:tc>
                 <a:extLst>
                   <a:ext uri="{0D108BD9-81ED-4DB2-BD59-A6C34878D82A}">
-                    <a16:rowId xmlns:a16="http://schemas.microsoft.com/office/drawing/2014/main" val="1210047444"/>
+                    <a16:rowId xmlns:a16="http://schemas.microsoft.com/office/drawing/2014/main" val="3705504161"/>
+                  </a:ext>
+                </a:extLst>
+              </a:tr>
+            </a:tbl>
+          </a:graphicData>
+        </a:graphic>
+      </p:graphicFrame>
+      <p:sp>
+        <p:nvSpPr>
+          <p:cNvPr id="129" name="직사각형 128">
+            <a:extLst>
+              <a:ext uri="{FF2B5EF4-FFF2-40B4-BE49-F238E27FC236}">
+                <a16:creationId xmlns:a16="http://schemas.microsoft.com/office/drawing/2014/main" id="{85B11007-5F2C-4FE8-F961-0E2CC05955D3}"/>
+              </a:ext>
+            </a:extLst>
+          </p:cNvPr>
+          <p:cNvSpPr/>
+          <p:nvPr/>
+        </p:nvSpPr>
+        <p:spPr>
+          <a:xfrm rot="5400000">
+            <a:off x="6940666" y="15417811"/>
+            <a:ext cx="1064164" cy="180640"/>
+          </a:xfrm>
+          <a:prstGeom prst="rect">
+            <a:avLst/>
+          </a:prstGeom>
+          <a:solidFill>
+            <a:schemeClr val="accent1">
+              <a:lumMod val="60000"/>
+              <a:lumOff val="40000"/>
+            </a:schemeClr>
+          </a:solidFill>
+          <a:ln>
+            <a:noFill/>
+          </a:ln>
+        </p:spPr>
+        <p:style>
+          <a:lnRef idx="2">
+            <a:schemeClr val="accent1">
+              <a:shade val="50000"/>
+            </a:schemeClr>
+          </a:lnRef>
+          <a:fillRef idx="1">
+            <a:schemeClr val="accent1"/>
+          </a:fillRef>
+          <a:effectRef idx="0">
+            <a:schemeClr val="accent1"/>
+          </a:effectRef>
+          <a:fontRef idx="minor">
+            <a:schemeClr val="lt1"/>
+          </a:fontRef>
+        </p:style>
+        <p:txBody>
+          <a:bodyPr rtlCol="0" anchor="ctr"/>
+          <a:lstStyle/>
+          <a:p>
+            <a:pPr algn="ctr"/>
+            <a:endParaRPr lang="ko-KR" altLang="en-US"/>
+          </a:p>
+        </p:txBody>
+      </p:sp>
+      <p:graphicFrame>
+        <p:nvGraphicFramePr>
+          <p:cNvPr id="137" name="표 136">
+            <a:extLst>
+              <a:ext uri="{FF2B5EF4-FFF2-40B4-BE49-F238E27FC236}">
+                <a16:creationId xmlns:a16="http://schemas.microsoft.com/office/drawing/2014/main" id="{9F11EEBF-20AD-34E6-0EBA-895754F119BE}"/>
+              </a:ext>
+            </a:extLst>
+          </p:cNvPr>
+          <p:cNvGraphicFramePr>
+            <a:graphicFrameLocks noGrp="1"/>
+          </p:cNvGraphicFramePr>
+          <p:nvPr>
+            <p:extLst>
+              <p:ext uri="{D42A27DB-BD31-4B8C-83A1-F6EECF244321}">
+                <p14:modId xmlns:p14="http://schemas.microsoft.com/office/powerpoint/2010/main" val="2856901222"/>
+              </p:ext>
+            </p:extLst>
+          </p:nvPr>
+        </p:nvGraphicFramePr>
+        <p:xfrm>
+          <a:off x="7259590" y="14662157"/>
+          <a:ext cx="441509" cy="313891"/>
+        </p:xfrm>
+        <a:graphic>
+          <a:graphicData uri="http://schemas.openxmlformats.org/drawingml/2006/table">
+            <a:tbl>
+              <a:tblPr firstRow="1" bandRow="1">
+                <a:tableStyleId>{5C22544A-7EE6-4342-B048-85BDC9FD1C3A}</a:tableStyleId>
+              </a:tblPr>
+              <a:tblGrid>
+                <a:gridCol w="441509">
+                  <a:extLst>
+                    <a:ext uri="{9D8B030D-6E8A-4147-A177-3AD203B41FA5}">
+                      <a16:colId xmlns:a16="http://schemas.microsoft.com/office/drawing/2014/main" val="3245210431"/>
+                    </a:ext>
+                  </a:extLst>
+                </a:gridCol>
+              </a:tblGrid>
+              <a:tr h="313891">
+                <a:tc>
+                  <a:txBody>
+                    <a:bodyPr/>
+                    <a:lstStyle/>
+                    <a:p>
+                      <a:pPr algn="ctr" latinLnBrk="1"/>
+                      <a:r>
+                        <a:rPr lang="en-US" altLang="ko-KR" sz="1200" dirty="0">
+                          <a:solidFill>
+                            <a:sysClr val="windowText" lastClr="000000"/>
+                          </a:solidFill>
+                        </a:rPr>
+                        <a:t>PC</a:t>
+                      </a:r>
+                      <a:endParaRPr lang="ko-KR" altLang="en-US" sz="1200" dirty="0">
+                        <a:solidFill>
+                          <a:sysClr val="windowText" lastClr="000000"/>
+                        </a:solidFill>
+                      </a:endParaRPr>
+                    </a:p>
+                  </a:txBody>
+                  <a:tcPr marL="62453" marR="62453" marT="45719" marB="45719" anchor="ctr">
+                    <a:lnL w="12700" cap="flat" cmpd="sng" algn="ctr">
+                      <a:solidFill>
+                        <a:schemeClr val="tx1"/>
+                      </a:solidFill>
+                      <a:prstDash val="solid"/>
+                      <a:round/>
+                      <a:headEnd type="none" w="med" len="med"/>
+                      <a:tailEnd type="none" w="med" len="med"/>
+                    </a:lnL>
+                    <a:lnR w="12700" cap="flat" cmpd="sng" algn="ctr">
+                      <a:solidFill>
+                        <a:schemeClr val="tx1"/>
+                      </a:solidFill>
+                      <a:prstDash val="solid"/>
+                      <a:round/>
+                      <a:headEnd type="none" w="med" len="med"/>
+                      <a:tailEnd type="none" w="med" len="med"/>
+                    </a:lnR>
+                    <a:lnT w="12700" cap="flat" cmpd="sng" algn="ctr">
+                      <a:solidFill>
+                        <a:schemeClr val="tx1"/>
+                      </a:solidFill>
+                      <a:prstDash val="solid"/>
+                      <a:round/>
+                      <a:headEnd type="none" w="med" len="med"/>
+                      <a:tailEnd type="none" w="med" len="med"/>
+                    </a:lnT>
+                    <a:lnB w="12700" cap="flat" cmpd="sng" algn="ctr">
+                      <a:solidFill>
+                        <a:schemeClr val="tx1"/>
+                      </a:solidFill>
+                      <a:prstDash val="solid"/>
+                      <a:round/>
+                      <a:headEnd type="none" w="med" len="med"/>
+                      <a:tailEnd type="none" w="med" len="med"/>
+                    </a:lnB>
+                    <a:solidFill>
+                      <a:schemeClr val="bg1"/>
+                    </a:solidFill>
+                  </a:tcPr>
+                </a:tc>
+                <a:extLst>
+                  <a:ext uri="{0D108BD9-81ED-4DB2-BD59-A6C34878D82A}">
+                    <a16:rowId xmlns:a16="http://schemas.microsoft.com/office/drawing/2014/main" val="3705504161"/>
+                  </a:ext>
+                </a:extLst>
+              </a:tr>
+            </a:tbl>
+          </a:graphicData>
+        </a:graphic>
+      </p:graphicFrame>
+      <p:sp>
+        <p:nvSpPr>
+          <p:cNvPr id="139" name="직사각형 138">
+            <a:extLst>
+              <a:ext uri="{FF2B5EF4-FFF2-40B4-BE49-F238E27FC236}">
+                <a16:creationId xmlns:a16="http://schemas.microsoft.com/office/drawing/2014/main" id="{53C8BB67-45B2-E4B6-4625-5C2E1B59E22D}"/>
+              </a:ext>
+            </a:extLst>
+          </p:cNvPr>
+          <p:cNvSpPr/>
+          <p:nvPr/>
+        </p:nvSpPr>
+        <p:spPr>
+          <a:xfrm rot="5400000">
+            <a:off x="1506025" y="15417811"/>
+            <a:ext cx="1064164" cy="180640"/>
+          </a:xfrm>
+          <a:prstGeom prst="rect">
+            <a:avLst/>
+          </a:prstGeom>
+          <a:solidFill>
+            <a:schemeClr val="accent1">
+              <a:lumMod val="60000"/>
+              <a:lumOff val="40000"/>
+            </a:schemeClr>
+          </a:solidFill>
+          <a:ln>
+            <a:noFill/>
+          </a:ln>
+        </p:spPr>
+        <p:style>
+          <a:lnRef idx="2">
+            <a:schemeClr val="accent1">
+              <a:shade val="50000"/>
+            </a:schemeClr>
+          </a:lnRef>
+          <a:fillRef idx="1">
+            <a:schemeClr val="accent1"/>
+          </a:fillRef>
+          <a:effectRef idx="0">
+            <a:schemeClr val="accent1"/>
+          </a:effectRef>
+          <a:fontRef idx="minor">
+            <a:schemeClr val="lt1"/>
+          </a:fontRef>
+        </p:style>
+        <p:txBody>
+          <a:bodyPr rtlCol="0" anchor="ctr"/>
+          <a:lstStyle/>
+          <a:p>
+            <a:pPr algn="ctr"/>
+            <a:endParaRPr lang="ko-KR" altLang="en-US"/>
+          </a:p>
+        </p:txBody>
+      </p:sp>
+      <p:graphicFrame>
+        <p:nvGraphicFramePr>
+          <p:cNvPr id="140" name="표 139">
+            <a:extLst>
+              <a:ext uri="{FF2B5EF4-FFF2-40B4-BE49-F238E27FC236}">
+                <a16:creationId xmlns:a16="http://schemas.microsoft.com/office/drawing/2014/main" id="{A56E50AE-9D38-B4D3-D75E-14E2812FCEEB}"/>
+              </a:ext>
+            </a:extLst>
+          </p:cNvPr>
+          <p:cNvGraphicFramePr>
+            <a:graphicFrameLocks noGrp="1"/>
+          </p:cNvGraphicFramePr>
+          <p:nvPr>
+            <p:extLst>
+              <p:ext uri="{D42A27DB-BD31-4B8C-83A1-F6EECF244321}">
+                <p14:modId xmlns:p14="http://schemas.microsoft.com/office/powerpoint/2010/main" val="497040786"/>
+              </p:ext>
+            </p:extLst>
+          </p:nvPr>
+        </p:nvGraphicFramePr>
+        <p:xfrm>
+          <a:off x="1824949" y="14662157"/>
+          <a:ext cx="441509" cy="313891"/>
+        </p:xfrm>
+        <a:graphic>
+          <a:graphicData uri="http://schemas.openxmlformats.org/drawingml/2006/table">
+            <a:tbl>
+              <a:tblPr firstRow="1" bandRow="1">
+                <a:tableStyleId>{5C22544A-7EE6-4342-B048-85BDC9FD1C3A}</a:tableStyleId>
+              </a:tblPr>
+              <a:tblGrid>
+                <a:gridCol w="441509">
+                  <a:extLst>
+                    <a:ext uri="{9D8B030D-6E8A-4147-A177-3AD203B41FA5}">
+                      <a16:colId xmlns:a16="http://schemas.microsoft.com/office/drawing/2014/main" val="3245210431"/>
+                    </a:ext>
+                  </a:extLst>
+                </a:gridCol>
+              </a:tblGrid>
+              <a:tr h="313891">
+                <a:tc>
+                  <a:txBody>
+                    <a:bodyPr/>
+                    <a:lstStyle/>
+                    <a:p>
+                      <a:pPr algn="ctr" latinLnBrk="1"/>
+                      <a:r>
+                        <a:rPr lang="en-US" altLang="ko-KR" sz="1200" dirty="0">
+                          <a:solidFill>
+                            <a:sysClr val="windowText" lastClr="000000"/>
+                          </a:solidFill>
+                        </a:rPr>
+                        <a:t>PC</a:t>
+                      </a:r>
+                      <a:endParaRPr lang="ko-KR" altLang="en-US" sz="1200" dirty="0">
+                        <a:solidFill>
+                          <a:sysClr val="windowText" lastClr="000000"/>
+                        </a:solidFill>
+                      </a:endParaRPr>
+                    </a:p>
+                  </a:txBody>
+                  <a:tcPr marL="62453" marR="62453" marT="45719" marB="45719" anchor="ctr">
+                    <a:lnL w="12700" cap="flat" cmpd="sng" algn="ctr">
+                      <a:solidFill>
+                        <a:schemeClr val="tx1"/>
+                      </a:solidFill>
+                      <a:prstDash val="solid"/>
+                      <a:round/>
+                      <a:headEnd type="none" w="med" len="med"/>
+                      <a:tailEnd type="none" w="med" len="med"/>
+                    </a:lnL>
+                    <a:lnR w="12700" cap="flat" cmpd="sng" algn="ctr">
+                      <a:solidFill>
+                        <a:schemeClr val="tx1"/>
+                      </a:solidFill>
+                      <a:prstDash val="solid"/>
+                      <a:round/>
+                      <a:headEnd type="none" w="med" len="med"/>
+                      <a:tailEnd type="none" w="med" len="med"/>
+                    </a:lnR>
+                    <a:lnT w="12700" cap="flat" cmpd="sng" algn="ctr">
+                      <a:solidFill>
+                        <a:schemeClr val="tx1"/>
+                      </a:solidFill>
+                      <a:prstDash val="solid"/>
+                      <a:round/>
+                      <a:headEnd type="none" w="med" len="med"/>
+                      <a:tailEnd type="none" w="med" len="med"/>
+                    </a:lnT>
+                    <a:lnB w="12700" cap="flat" cmpd="sng" algn="ctr">
+                      <a:solidFill>
+                        <a:schemeClr val="tx1"/>
+                      </a:solidFill>
+                      <a:prstDash val="solid"/>
+                      <a:round/>
+                      <a:headEnd type="none" w="med" len="med"/>
+                      <a:tailEnd type="none" w="med" len="med"/>
+                    </a:lnB>
+                    <a:solidFill>
+                      <a:schemeClr val="bg1"/>
+                    </a:solidFill>
+                  </a:tcPr>
+                </a:tc>
+                <a:extLst>
+                  <a:ext uri="{0D108BD9-81ED-4DB2-BD59-A6C34878D82A}">
+                    <a16:rowId xmlns:a16="http://schemas.microsoft.com/office/drawing/2014/main" val="3705504161"/>
                   </a:ext>
                 </a:extLst>
               </a:tr>
